--- a/media/resources/files/Ekvivalenettuuluk_BOPK_3TuTutashtyr.pptx
+++ b/media/resources/files/Ekvivalenettuuluk_BOPK_3TuTutashtyr.pptx
@@ -37076,7 +37076,7 @@
             </a:pPr>
             <a:r>
               <a:rPr lang="ru-RU" dirty="0"/>
-              <a:t>Турдуу пикирлер учун ыраазычылык билдиребиз.</a:t>
+              <a:t>Түрдүү пикирлер үчүн ыраазычылык билдиребиз.</a:t>
             </a:r>
           </a:p>
           <a:p>

--- a/media/resources/files/Ekvivalenettuuluk_BOPK_3TuTutashtyr.pptx
+++ b/media/resources/files/Ekvivalenettuuluk_BOPK_3TuTutashtyr.pptx
@@ -3814,7 +3814,7 @@
                 <a:ea typeface="+mn-ea"/>
                 <a:cs typeface="+mn-cs"/>
               </a:rPr>
-              <a:t>Ошол команда үчүн квадратты талап кылуу үчүн жооп кутучасынын тиешелүү көлөкө тарабын чыкылдатыңыз/тийиңиз.</a:t>
+              <a:t>Ошол команданын квадратын ээлөө үчүн жооп кутучасынын боёлгон бөлүгүн басыңыз.</a:t>
             </a:r>
           </a:p>
           <a:p>
